--- a/report/Pitch_3min_BatmanAndRobin.pptx
+++ b/report/Pitch_3min_BatmanAndRobin.pptx
@@ -112,24 +112,24 @@
   <p:extLst>
     <p:ext uri="{521415D9-36F7-43E2-AB2F-B90AF26B5E84}">
       <p14:sectionLst xmlns:p14="http://schemas.microsoft.com/office/powerpoint/2010/main">
-        <p14:section name="Opening" id="{9e923ddf-8c1c-8d09-5243-a09b45519501}">
+        <p14:section name="Opening" id="{4c4c28de-f2b6-c4db-cdad-98d318b366a4}">
           <p14:sldIdLst>
             <p14:sldId id="256"/>
           </p14:sldIdLst>
         </p14:section>
-        <p14:section name="Insight" id="{9d3db290-de2d-4509-f0a2-5854c99502ea}">
+        <p14:section name="Insight" id="{f7489d27-d0eb-d6ac-02a2-7311b8a35569}">
           <p14:sldIdLst>
             <p14:sldId id="257"/>
           </p14:sldIdLst>
         </p14:section>
-        <p14:section name="Results" id="{1a0b3eeb-db22-176e-aaa1-4e2a04273821}">
+        <p14:section name="Results" id="{10c6e09a-1e0b-f98d-a75c-fdf8b5f93074}">
           <p14:sldIdLst>
             <p14:sldId id="258"/>
             <p14:sldId id="259"/>
             <p14:sldId id="260"/>
           </p14:sldIdLst>
         </p14:section>
-        <p14:section name="Close" id="{9e58fc0c-817b-1910-3a6f-8b551025dc98}">
+        <p14:section name="Close" id="{d9012bc8-f428-a040-fd0c-62869a56cc5e}">
           <p14:sldIdLst>
             <p14:sldId id="261"/>
           </p14:sldIdLst>
@@ -4424,7 +4424,7 @@
                   <a:schemeClr val="tx2"/>
                 </a:solidFill>
               </a:rPr>
-              <a:t>Hard relay cases (16% of suspicious) are built from the same template as 19,800 normal ones; about 20 signals we tried stayed at chance. 25 labels are random by design.</a:t>
+              <a:t>Hard relay cases (16% of suspicious) come in 12 batches of 100 near-identical relay scenarios with exactly one laundering per batch; even against its 99 siblings it looks ordinary on every stat we tried. 25 labels are random by design.</a:t>
             </a:r>
             <a:endParaRPr lang="en-US" sz="1600" dirty="0"/>
           </a:p>

--- a/report/Pitch_3min_BatmanAndRobin.pptx
+++ b/report/Pitch_3min_BatmanAndRobin.pptx
@@ -112,24 +112,24 @@
   <p:extLst>
     <p:ext uri="{521415D9-36F7-43E2-AB2F-B90AF26B5E84}">
       <p14:sectionLst xmlns:p14="http://schemas.microsoft.com/office/powerpoint/2010/main">
-        <p14:section name="Opening" id="{4c4c28de-f2b6-c4db-cdad-98d318b366a4}">
+        <p14:section name="Opening" id="{820073a1-802f-6764-a970-26d35e811173}">
           <p14:sldIdLst>
             <p14:sldId id="256"/>
           </p14:sldIdLst>
         </p14:section>
-        <p14:section name="Insight" id="{f7489d27-d0eb-d6ac-02a2-7311b8a35569}">
+        <p14:section name="Insight" id="{30c11931-651b-9a6a-392d-313256586d08}">
           <p14:sldIdLst>
             <p14:sldId id="257"/>
           </p14:sldIdLst>
         </p14:section>
-        <p14:section name="Results" id="{10c6e09a-1e0b-f98d-a75c-fdf8b5f93074}">
+        <p14:section name="Results" id="{5e24020f-47c6-f0c0-3299-704b7de25e86}">
           <p14:sldIdLst>
             <p14:sldId id="258"/>
             <p14:sldId id="259"/>
             <p14:sldId id="260"/>
           </p14:sldIdLst>
         </p14:section>
-        <p14:section name="Close" id="{d9012bc8-f428-a040-fd0c-62869a56cc5e}">
+        <p14:section name="Close" id="{9a22d53a-9408-d67f-36e9-53910743e02f}">
           <p14:sldIdLst>
             <p14:sldId id="261"/>
           </p14:sldIdLst>
@@ -3522,7 +3522,7 @@
       </p:sp>
       <p:sp>
         <p:nvSpPr>
-          <p:cNvPr id="24" name="card Rank 4   8AA1DCA1..."/>
+          <p:cNvPr id="24" name="card Rank 16   8AA1DCA1..."/>
           <p:cNvSpPr/>
           <p:nvPr/>
         </p:nvSpPr>
@@ -3580,7 +3580,7 @@
                   <a:schemeClr val="tx1"/>
                 </a:solidFill>
               </a:rPr>
-              <a:t>Rank 4   8AA1DCA1...</a:t>
+              <a:t>Rank 16   8AA1DCA1...</a:t>
             </a:r>
             <a:endParaRPr lang="en-US" sz="1600" dirty="0"/>
           </a:p>
@@ -3605,7 +3605,7 @@
       </p:sp>
       <p:sp>
         <p:nvSpPr>
-          <p:cNvPr id="26" name="card Rank 5   41EF2ECA..."/>
+          <p:cNvPr id="26" name="card Rank 93   41EF2ECA..."/>
           <p:cNvSpPr/>
           <p:nvPr/>
         </p:nvSpPr>
@@ -3663,7 +3663,7 @@
                   <a:schemeClr val="tx1"/>
                 </a:solidFill>
               </a:rPr>
-              <a:t>Rank 5   41EF2ECA...</a:t>
+              <a:t>Rank 93   41EF2ECA...</a:t>
             </a:r>
             <a:endParaRPr lang="en-US" sz="1600" dirty="0"/>
           </a:p>
@@ -3680,7 +3680,7 @@
                   <a:schemeClr val="tx2"/>
                 </a:solidFill>
               </a:rPr>
-              <a:t>Four new wallets, four assets, merged in GBP in 2 minutes. The collector's next payment, to an old contact, ranks 17,189: we score the motif, not the wallet.</a:t>
+              <a:t>Four new wallets, four assets, merged in GBP in 2 minutes. The collector's next payment, to an old contact, ranks 36060: we score the motif, not the wallet.</a:t>
             </a:r>
             <a:endParaRPr lang="en-US" sz="1600" dirty="0"/>
           </a:p>
@@ -4088,7 +4088,7 @@
                 <a:ea typeface="Cambria" pitchFamily="34" charset="-122"/>
                 <a:cs typeface="Cambria" pitchFamily="34" charset="-120"/>
               </a:rPr>
-              <a:t>1,975</a:t>
+              <a:t>1,204</a:t>
             </a:r>
             <a:endParaRPr lang="en-US" sz="4000" dirty="0"/>
           </a:p>

--- a/report/Pitch_3min_BatmanAndRobin.pptx
+++ b/report/Pitch_3min_BatmanAndRobin.pptx
@@ -112,24 +112,24 @@
   <p:extLst>
     <p:ext uri="{521415D9-36F7-43E2-AB2F-B90AF26B5E84}">
       <p14:sectionLst xmlns:p14="http://schemas.microsoft.com/office/powerpoint/2010/main">
-        <p14:section name="Opening" id="{820073a1-802f-6764-a970-26d35e811173}">
+        <p14:section name="Opening" id="{61e21416-137f-b356-62d0-08856b9750f8}">
           <p14:sldIdLst>
             <p14:sldId id="256"/>
           </p14:sldIdLst>
         </p14:section>
-        <p14:section name="Insight" id="{30c11931-651b-9a6a-392d-313256586d08}">
+        <p14:section name="Insight" id="{6e9edd21-f6f0-f5f5-b232-de19126387ce}">
           <p14:sldIdLst>
             <p14:sldId id="257"/>
           </p14:sldIdLst>
         </p14:section>
-        <p14:section name="Results" id="{5e24020f-47c6-f0c0-3299-704b7de25e86}">
+        <p14:section name="Results" id="{531a737b-96da-42ca-4999-3571febce445}">
           <p14:sldIdLst>
             <p14:sldId id="258"/>
             <p14:sldId id="259"/>
             <p14:sldId id="260"/>
           </p14:sldIdLst>
         </p14:section>
-        <p14:section name="Close" id="{9a22d53a-9408-d67f-36e9-53910743e02f}">
+        <p14:section name="Close" id="{640ea9b4-027b-8289-fe82-919a0d72e595}">
           <p14:sldIdLst>
             <p14:sldId id="261"/>
           </p14:sldIdLst>
@@ -2733,7 +2733,7 @@
                 <a:ea typeface="Cambria" pitchFamily="34" charset="-122"/>
                 <a:cs typeface="Cambria" pitchFamily="34" charset="-120"/>
               </a:rPr>
-              <a:t>69.2</a:t>
+              <a:t>70.3</a:t>
             </a:r>
             <a:endParaRPr lang="en-US" sz="4000" dirty="0"/>
           </a:p>
@@ -2769,7 +2769,7 @@
                   <a:schemeClr val="tx2"/>
                 </a:solidFill>
               </a:rPr>
-              <a:t>final leaderboard score (v17, best so far)</a:t>
+              <a:t>final leaderboard score (blend of six models)</a:t>
             </a:r>
             <a:endParaRPr lang="en-US" sz="1300" dirty="0"/>
           </a:p>
@@ -2844,7 +2844,7 @@
                   <a:schemeClr val="tx2"/>
                 </a:solidFill>
               </a:rPr>
-              <a:t>out-of-fold AP, grouped 5-fold</a:t>
+              <a:t>out-of-fold AP of v17, the strongest single model</a:t>
             </a:r>
             <a:endParaRPr lang="en-US" sz="1300" dirty="0"/>
           </a:p>
